--- a/output/slides/ミテハナさん_発表スライド.pptx
+++ b/output/slides/ミテハナさん_発表スライド.pptx
@@ -5362,7 +5362,7 @@
                 <a:ea typeface="Noto Sans JP" pitchFamily="34" charset="-122"/>
                 <a:cs typeface="Noto Sans JP" pitchFamily="34" charset="-120"/>
               </a:rPr>
-              <a:t>　10年後: 台帳は「巡回するAI社員」が更新する</a:t>
+              <a:t>　次の展開：安全に広げ、棚卸から巡回へ</a:t>
             </a:r>
             <a:endParaRPr lang="en-US" sz="2600" dirty="0"/>
           </a:p>
@@ -5425,7 +5425,7 @@
                 <a:ea typeface="Noto Sans JP" pitchFamily="34" charset="-122"/>
                 <a:cs typeface="Noto Sans JP" pitchFamily="34" charset="-120"/>
               </a:rPr>
-              <a:t>人は確認、AIは日々の記録を担う。</a:t>
+              <a:t>AIは提案まで。人が確定する今の仕組みを守って広げる。</a:t>
             </a:r>
             <a:endParaRPr lang="en-US" sz="1750" dirty="0"/>
           </a:p>
@@ -5463,12 +5463,12 @@
         </p:nvSpPr>
         <p:spPr>
           <a:xfrm>
-            <a:off x="457200" y="1956816"/>
-            <a:ext cx="2438400" cy="2736799"/>
+            <a:off x="457200" y="1682496"/>
+            <a:ext cx="2651760" cy="3011119"/>
           </a:xfrm>
           <a:prstGeom prst="roundRect">
             <a:avLst>
-              <a:gd name="adj" fmla="val 3750"/>
+              <a:gd name="adj" fmla="val 3448"/>
             </a:avLst>
           </a:prstGeom>
           <a:solidFill>
@@ -5497,8 +5497,8 @@
         </p:nvSpPr>
         <p:spPr>
           <a:xfrm>
-            <a:off x="1402080" y="1682496"/>
-            <a:ext cx="548640" cy="548640"/>
+            <a:off x="1485900" y="1883664"/>
+            <a:ext cx="594360" cy="594360"/>
           </a:xfrm>
           <a:prstGeom prst="ellipse">
             <a:avLst/>
@@ -5509,16 +5509,40 @@
           <a:ln/>
         </p:spPr>
       </p:sp>
-      <p:sp>
-        <p:nvSpPr>
-          <p:cNvPr id="8" name="Text 4"/>
-          <p:cNvSpPr/>
-          <p:nvPr/>
-        </p:nvSpPr>
-        <p:spPr>
-          <a:xfrm>
-            <a:off x="1402080" y="1682496"/>
-            <a:ext cx="548640" cy="548640"/>
+      <p:pic>
+        <p:nvPicPr>
+          <p:cNvPr id="8" name="Image 2" descr="C:\Users\fan_o\AppData\Local\Temp\ttppt_icons\shield-check_FFFFFF_256.png">    </p:cNvPr>
+          <p:cNvPicPr>
+            <a:picLocks noChangeAspect="1"/>
+          </p:cNvPicPr>
+          <p:nvPr/>
+        </p:nvPicPr>
+        <p:blipFill>
+          <a:blip r:embed="rId3"/>
+          <a:stretch>
+            <a:fillRect/>
+          </a:stretch>
+        </p:blipFill>
+        <p:spPr>
+          <a:xfrm>
+            <a:off x="1598828" y="1996592"/>
+            <a:ext cx="368503" cy="368503"/>
+          </a:xfrm>
+          <a:prstGeom prst="rect">
+            <a:avLst/>
+          </a:prstGeom>
+        </p:spPr>
+      </p:pic>
+      <p:sp>
+        <p:nvSpPr>
+          <p:cNvPr id="9" name="Text 4"/>
+          <p:cNvSpPr/>
+          <p:nvPr/>
+        </p:nvSpPr>
+        <p:spPr>
+          <a:xfrm>
+            <a:off x="685800" y="2596896"/>
+            <a:ext cx="2286000" cy="365760"/>
           </a:xfrm>
           <a:prstGeom prst="rect">
             <a:avLst/>
@@ -5534,30 +5558,30 @@
               <a:buNone/>
             </a:pPr>
             <a:r>
-              <a:rPr lang="en-US" sz="1500" b="1" dirty="0">
-                <a:solidFill>
-                  <a:srgbClr val="FFFFFF"/>
-                </a:solidFill>
-                <a:latin typeface="Noto Sans JP" pitchFamily="34" charset="0"/>
-                <a:ea typeface="Noto Sans JP" pitchFamily="34" charset="-122"/>
-                <a:cs typeface="Noto Sans JP" pitchFamily="34" charset="-120"/>
-              </a:rPr>
-              <a:t>01</a:t>
-            </a:r>
-            <a:endParaRPr lang="en-US" sz="1500" dirty="0"/>
-          </a:p>
-        </p:txBody>
-      </p:sp>
-      <p:sp>
-        <p:nvSpPr>
-          <p:cNvPr id="9" name="Text 5"/>
-          <p:cNvSpPr/>
-          <p:nvPr/>
-        </p:nvSpPr>
-        <p:spPr>
-          <a:xfrm>
-            <a:off x="548640" y="2340864"/>
-            <a:ext cx="2255520" cy="365760"/>
+              <a:rPr lang="en-US" sz="1600" b="1" dirty="0">
+                <a:solidFill>
+                  <a:srgbClr val="1A1A1A"/>
+                </a:solidFill>
+                <a:latin typeface="Noto Sans JP" pitchFamily="34" charset="0"/>
+                <a:ea typeface="Noto Sans JP" pitchFamily="34" charset="-122"/>
+                <a:cs typeface="Noto Sans JP" pitchFamily="34" charset="-120"/>
+              </a:rPr>
+              <a:t>まず、安全に</a:t>
+            </a:r>
+            <a:endParaRPr lang="en-US" sz="1600" dirty="0"/>
+          </a:p>
+        </p:txBody>
+      </p:sp>
+      <p:sp>
+        <p:nvSpPr>
+          <p:cNvPr id="10" name="Text 5"/>
+          <p:cNvSpPr/>
+          <p:nvPr/>
+        </p:nvSpPr>
+        <p:spPr>
+          <a:xfrm>
+            <a:off x="685800" y="2980944"/>
+            <a:ext cx="2286000" cy="1548079"/>
           </a:xfrm>
           <a:prstGeom prst="rect">
             <a:avLst/>
@@ -5573,85 +5597,41 @@
               <a:buNone/>
             </a:pPr>
             <a:r>
-              <a:rPr lang="en-US" sz="1500" b="1" dirty="0">
-                <a:solidFill>
-                  <a:srgbClr val="1A1A1A"/>
-                </a:solidFill>
-                <a:latin typeface="Noto Sans JP" pitchFamily="34" charset="0"/>
-                <a:ea typeface="Noto Sans JP" pitchFamily="34" charset="-122"/>
-                <a:cs typeface="Noto Sans JP" pitchFamily="34" charset="-120"/>
-              </a:rPr>
-              <a:t>今日</a:t>
-            </a:r>
-            <a:endParaRPr lang="en-US" sz="1500" dirty="0"/>
-          </a:p>
-        </p:txBody>
-      </p:sp>
-      <p:sp>
-        <p:nvSpPr>
-          <p:cNvPr id="10" name="Text 6"/>
-          <p:cNvSpPr/>
-          <p:nvPr/>
-        </p:nvSpPr>
-        <p:spPr>
-          <a:xfrm>
-            <a:off x="1200912" y="2807208"/>
-            <a:ext cx="950976" cy="950976"/>
-          </a:xfrm>
-          <a:prstGeom prst="rect">
-            <a:avLst/>
-          </a:prstGeom>
-          <a:noFill/>
-          <a:ln/>
-        </p:spPr>
-        <p:txBody>
-          <a:bodyPr wrap="square" lIns="0" tIns="0" rIns="0" bIns="0" rtlCol="0" anchor="ctr"/>
-          <a:lstStyle/>
+              <a:rPr lang="en-US" sz="1250" dirty="0">
+                <a:solidFill>
+                  <a:srgbClr val="333333"/>
+                </a:solidFill>
+                <a:latin typeface="Noto Sans JP" pitchFamily="34" charset="0"/>
+                <a:ea typeface="Noto Sans JP" pitchFamily="34" charset="-122"/>
+                <a:cs typeface="Noto Sans JP" pitchFamily="34" charset="-120"/>
+              </a:rPr>
+              <a:t>品目を実数へ拡張</a:t>
+            </a:r>
+            <a:endParaRPr lang="en-US" sz="1250" dirty="0"/>
+          </a:p>
           <a:p>
             <a:pPr algn="ctr" indent="0" marL="0">
               <a:buNone/>
             </a:pPr>
             <a:r>
-              <a:rPr lang="en-US" sz="3700" dirty="0">
-                <a:solidFill>
-                  <a:srgbClr val="029E9B"/>
-                </a:solidFill>
-                <a:latin typeface="Noto Sans JP" pitchFamily="34" charset="0"/>
-                <a:ea typeface="Noto Sans JP" pitchFamily="34" charset="-122"/>
-                <a:cs typeface="Noto Sans JP" pitchFamily="34" charset="-120"/>
-              </a:rPr>
-              <a:t>📷</a:t>
-            </a:r>
-            <a:endParaRPr lang="en-US" sz="3700" dirty="0"/>
-          </a:p>
-        </p:txBody>
-      </p:sp>
-      <p:sp>
-        <p:nvSpPr>
-          <p:cNvPr id="11" name="Text 7"/>
-          <p:cNvSpPr/>
-          <p:nvPr/>
-        </p:nvSpPr>
-        <p:spPr>
-          <a:xfrm>
-            <a:off x="594360" y="3922776"/>
-            <a:ext cx="2164080" cy="633679"/>
-          </a:xfrm>
-          <a:prstGeom prst="rect">
-            <a:avLst/>
-          </a:prstGeom>
-          <a:noFill/>
-          <a:ln/>
-        </p:spPr>
-        <p:txBody>
-          <a:bodyPr wrap="square" lIns="0" tIns="0" rIns="0" bIns="0" rtlCol="0" anchor="t"/>
-          <a:lstStyle/>
+              <a:rPr lang="en-US" sz="1250" dirty="0">
+                <a:solidFill>
+                  <a:srgbClr val="333333"/>
+                </a:solidFill>
+                <a:latin typeface="Noto Sans JP" pitchFamily="34" charset="0"/>
+                <a:ea typeface="Noto Sans JP" pitchFamily="34" charset="-122"/>
+                <a:cs typeface="Noto Sans JP" pitchFamily="34" charset="-120"/>
+              </a:rPr>
+              <a:t>ログイン・権限・操作記録</a:t>
+            </a:r>
+            <a:endParaRPr lang="en-US" sz="1250" dirty="0"/>
+          </a:p>
           <a:p>
             <a:pPr algn="ctr" indent="0" marL="0">
               <a:buNone/>
             </a:pPr>
             <a:r>
-              <a:rPr lang="en-US" sz="1150" dirty="0">
+              <a:rPr lang="en-US" sz="1250" dirty="0">
                 <a:solidFill>
                   <a:srgbClr val="333333"/>
                 </a:solidFill>
@@ -5659,63 +5639,26 @@
                 <a:ea typeface="Noto Sans JP" pitchFamily="34" charset="-122"/>
                 <a:cs typeface="Noto Sans JP" pitchFamily="34" charset="-120"/>
               </a:rPr>
-              <a:t>人がカメラを持って</a:t>
-            </a:r>
-            <a:endParaRPr lang="en-US" sz="1150" dirty="0"/>
-          </a:p>
-          <a:p>
-            <a:pPr algn="ctr" indent="0" marL="0">
-              <a:buNone/>
-            </a:pPr>
-            <a:r>
-              <a:rPr lang="en-US" sz="1150" dirty="0">
-                <a:solidFill>
-                  <a:srgbClr val="333333"/>
-                </a:solidFill>
-                <a:latin typeface="Noto Sans JP" pitchFamily="34" charset="0"/>
-                <a:ea typeface="Noto Sans JP" pitchFamily="34" charset="-122"/>
-                <a:cs typeface="Noto Sans JP" pitchFamily="34" charset="-120"/>
-              </a:rPr>
-              <a:t>話しかける</a:t>
-            </a:r>
-            <a:endParaRPr lang="en-US" sz="1150" dirty="0"/>
-          </a:p>
-        </p:txBody>
-      </p:sp>
-      <p:sp>
-        <p:nvSpPr>
-          <p:cNvPr id="12" name="Shape 8"/>
-          <p:cNvSpPr/>
-          <p:nvPr/>
-        </p:nvSpPr>
-        <p:spPr>
-          <a:xfrm>
-            <a:off x="2932176" y="3188056"/>
-            <a:ext cx="384048" cy="274320"/>
-          </a:xfrm>
-          <a:prstGeom prst="chevron">
-            <a:avLst/>
-          </a:prstGeom>
-          <a:solidFill>
-            <a:srgbClr val="029E9B"/>
-          </a:solidFill>
-          <a:ln/>
-        </p:spPr>
-      </p:sp>
-      <p:sp>
-        <p:nvSpPr>
-          <p:cNvPr id="13" name="Shape 9"/>
-          <p:cNvSpPr/>
-          <p:nvPr/>
-        </p:nvSpPr>
-        <p:spPr>
-          <a:xfrm>
-            <a:off x="3352800" y="1956816"/>
-            <a:ext cx="2438400" cy="2736799"/>
+              <a:t>音声「はい」の精度を測定</a:t>
+            </a:r>
+            <a:endParaRPr lang="en-US" sz="1250" dirty="0"/>
+          </a:p>
+        </p:txBody>
+      </p:sp>
+      <p:sp>
+        <p:nvSpPr>
+          <p:cNvPr id="11" name="Shape 6"/>
+          <p:cNvSpPr/>
+          <p:nvPr/>
+        </p:nvSpPr>
+        <p:spPr>
+          <a:xfrm>
+            <a:off x="3246120" y="1682496"/>
+            <a:ext cx="2651760" cy="3011119"/>
           </a:xfrm>
           <a:prstGeom prst="roundRect">
             <a:avLst>
-              <a:gd name="adj" fmla="val 3750"/>
+              <a:gd name="adj" fmla="val 3448"/>
             </a:avLst>
           </a:prstGeom>
           <a:solidFill>
@@ -5738,14 +5681,14 @@
       </p:sp>
       <p:sp>
         <p:nvSpPr>
-          <p:cNvPr id="14" name="Shape 10"/>
-          <p:cNvSpPr/>
-          <p:nvPr/>
-        </p:nvSpPr>
-        <p:spPr>
-          <a:xfrm>
-            <a:off x="4297680" y="1682496"/>
-            <a:ext cx="548640" cy="548640"/>
+          <p:cNvPr id="12" name="Shape 7"/>
+          <p:cNvSpPr/>
+          <p:nvPr/>
+        </p:nvSpPr>
+        <p:spPr>
+          <a:xfrm>
+            <a:off x="4274820" y="1883664"/>
+            <a:ext cx="594360" cy="594360"/>
           </a:xfrm>
           <a:prstGeom prst="ellipse">
             <a:avLst/>
@@ -5756,102 +5699,24 @@
           <a:ln/>
         </p:spPr>
       </p:sp>
-      <p:sp>
-        <p:nvSpPr>
-          <p:cNvPr id="15" name="Text 11"/>
-          <p:cNvSpPr/>
-          <p:nvPr/>
-        </p:nvSpPr>
-        <p:spPr>
-          <a:xfrm>
-            <a:off x="4297680" y="1682496"/>
-            <a:ext cx="548640" cy="548640"/>
-          </a:xfrm>
-          <a:prstGeom prst="rect">
-            <a:avLst/>
-          </a:prstGeom>
-          <a:noFill/>
-          <a:ln/>
-        </p:spPr>
-        <p:txBody>
-          <a:bodyPr wrap="square" lIns="0" tIns="0" rIns="0" bIns="0" rtlCol="0" anchor="ctr"/>
-          <a:lstStyle/>
-          <a:p>
-            <a:pPr algn="ctr" indent="0" marL="0">
-              <a:buNone/>
-            </a:pPr>
-            <a:r>
-              <a:rPr lang="en-US" sz="1500" b="1" dirty="0">
-                <a:solidFill>
-                  <a:srgbClr val="FFFFFF"/>
-                </a:solidFill>
-                <a:latin typeface="Noto Sans JP" pitchFamily="34" charset="0"/>
-                <a:ea typeface="Noto Sans JP" pitchFamily="34" charset="-122"/>
-                <a:cs typeface="Noto Sans JP" pitchFamily="34" charset="-120"/>
-              </a:rPr>
-              <a:t>02</a:t>
-            </a:r>
-            <a:endParaRPr lang="en-US" sz="1500" dirty="0"/>
-          </a:p>
-        </p:txBody>
-      </p:sp>
-      <p:sp>
-        <p:nvSpPr>
-          <p:cNvPr id="16" name="Text 12"/>
-          <p:cNvSpPr/>
-          <p:nvPr/>
-        </p:nvSpPr>
-        <p:spPr>
-          <a:xfrm>
-            <a:off x="3444240" y="2340864"/>
-            <a:ext cx="2255520" cy="365760"/>
-          </a:xfrm>
-          <a:prstGeom prst="rect">
-            <a:avLst/>
-          </a:prstGeom>
-          <a:noFill/>
-          <a:ln/>
-        </p:spPr>
-        <p:txBody>
-          <a:bodyPr wrap="square" lIns="0" tIns="0" rIns="0" bIns="0" rtlCol="0" anchor="ctr"/>
-          <a:lstStyle/>
-          <a:p>
-            <a:pPr algn="ctr" indent="0" marL="0">
-              <a:buNone/>
-            </a:pPr>
-            <a:r>
-              <a:rPr lang="en-US" sz="1500" b="1" dirty="0">
-                <a:solidFill>
-                  <a:srgbClr val="1A1A1A"/>
-                </a:solidFill>
-                <a:latin typeface="Noto Sans JP" pitchFamily="34" charset="0"/>
-                <a:ea typeface="Noto Sans JP" pitchFamily="34" charset="-122"/>
-                <a:cs typeface="Noto Sans JP" pitchFamily="34" charset="-120"/>
-              </a:rPr>
-              <a:t>次</a:t>
-            </a:r>
-            <a:endParaRPr lang="en-US" sz="1500" dirty="0"/>
-          </a:p>
-        </p:txBody>
-      </p:sp>
       <p:pic>
         <p:nvPicPr>
-          <p:cNvPr id="17" name="Image 2" descr="C:\Users\fan_o\AppData\Local\Temp\ttppt_icons\glasses_029E9B_256.png">    </p:cNvPr>
+          <p:cNvPr id="13" name="Image 3" descr="C:\Users\fan_o\AppData\Local\Temp\ttppt_icons\clipboard-list_FFFFFF_256.png">    </p:cNvPr>
           <p:cNvPicPr>
             <a:picLocks noChangeAspect="1"/>
           </p:cNvPicPr>
           <p:nvPr/>
         </p:nvPicPr>
         <p:blipFill>
-          <a:blip r:embed="rId3"/>
+          <a:blip r:embed="rId4"/>
           <a:stretch>
             <a:fillRect/>
           </a:stretch>
         </p:blipFill>
         <p:spPr>
           <a:xfrm>
-            <a:off x="4096512" y="2807208"/>
-            <a:ext cx="950976" cy="950976"/>
+            <a:off x="4387748" y="1996592"/>
+            <a:ext cx="368503" cy="368503"/>
           </a:xfrm>
           <a:prstGeom prst="rect">
             <a:avLst/>
@@ -5860,14 +5725,14 @@
       </p:pic>
       <p:sp>
         <p:nvSpPr>
-          <p:cNvPr id="18" name="Text 13"/>
-          <p:cNvSpPr/>
-          <p:nvPr/>
-        </p:nvSpPr>
-        <p:spPr>
-          <a:xfrm>
-            <a:off x="3489960" y="3922776"/>
-            <a:ext cx="2164080" cy="633679"/>
+          <p:cNvPr id="14" name="Text 8"/>
+          <p:cNvSpPr/>
+          <p:nvPr/>
+        </p:nvSpPr>
+        <p:spPr>
+          <a:xfrm>
+            <a:off x="3474720" y="2596896"/>
+            <a:ext cx="2286000" cy="365760"/>
           </a:xfrm>
           <a:prstGeom prst="rect">
             <a:avLst/>
@@ -5876,14 +5741,53 @@
           <a:ln/>
         </p:spPr>
         <p:txBody>
-          <a:bodyPr wrap="square" lIns="0" tIns="0" rIns="0" bIns="0" rtlCol="0" anchor="t"/>
+          <a:bodyPr wrap="square" lIns="0" tIns="0" rIns="0" bIns="0" rtlCol="0" anchor="ctr"/>
           <a:lstStyle/>
           <a:p>
             <a:pPr algn="ctr" indent="0" marL="0">
               <a:buNone/>
             </a:pPr>
             <a:r>
-              <a:rPr lang="en-US" sz="1150" dirty="0">
+              <a:rPr lang="en-US" sz="1600" b="1" dirty="0">
+                <a:solidFill>
+                  <a:srgbClr val="1A1A1A"/>
+                </a:solidFill>
+                <a:latin typeface="Noto Sans JP" pitchFamily="34" charset="0"/>
+                <a:ea typeface="Noto Sans JP" pitchFamily="34" charset="-122"/>
+                <a:cs typeface="Noto Sans JP" pitchFamily="34" charset="-120"/>
+              </a:rPr>
+              <a:t>次に、棚卸へ</a:t>
+            </a:r>
+            <a:endParaRPr lang="en-US" sz="1600" dirty="0"/>
+          </a:p>
+        </p:txBody>
+      </p:sp>
+      <p:sp>
+        <p:nvSpPr>
+          <p:cNvPr id="15" name="Text 9"/>
+          <p:cNvSpPr/>
+          <p:nvPr/>
+        </p:nvSpPr>
+        <p:spPr>
+          <a:xfrm>
+            <a:off x="3474720" y="2980944"/>
+            <a:ext cx="2286000" cy="1548079"/>
+          </a:xfrm>
+          <a:prstGeom prst="rect">
+            <a:avLst/>
+          </a:prstGeom>
+          <a:noFill/>
+          <a:ln/>
+        </p:spPr>
+        <p:txBody>
+          <a:bodyPr wrap="square" lIns="0" tIns="0" rIns="0" bIns="0" rtlCol="0" anchor="ctr"/>
+          <a:lstStyle/>
+          <a:p>
+            <a:pPr algn="ctr" indent="0" marL="0">
+              <a:buNone/>
+            </a:pPr>
+            <a:r>
+              <a:rPr lang="en-US" sz="1250" dirty="0">
                 <a:solidFill>
                   <a:srgbClr val="333333"/>
                 </a:solidFill>
@@ -5891,16 +5795,16 @@
                 <a:ea typeface="Noto Sans JP" pitchFamily="34" charset="-122"/>
                 <a:cs typeface="Noto Sans JP" pitchFamily="34" charset="-120"/>
               </a:rPr>
-              <a:t>AIグラス・見守りカメラで</a:t>
-            </a:r>
-            <a:endParaRPr lang="en-US" sz="1150" dirty="0"/>
+              <a:t>映った物と台帳を突合</a:t>
+            </a:r>
+            <a:endParaRPr lang="en-US" sz="1250" dirty="0"/>
           </a:p>
           <a:p>
             <a:pPr algn="ctr" indent="0" marL="0">
               <a:buNone/>
             </a:pPr>
             <a:r>
-              <a:rPr lang="en-US" sz="1150" dirty="0">
+              <a:rPr lang="en-US" sz="1250" dirty="0">
                 <a:solidFill>
                   <a:srgbClr val="333333"/>
                 </a:solidFill>
@@ -5908,46 +5812,43 @@
                 <a:ea typeface="Noto Sans JP" pitchFamily="34" charset="-122"/>
                 <a:cs typeface="Noto Sans JP" pitchFamily="34" charset="-120"/>
               </a:rPr>
-              <a:t>所在と数を常時確認</a:t>
-            </a:r>
-            <a:endParaRPr lang="en-US" sz="1150" dirty="0"/>
-          </a:p>
-        </p:txBody>
-      </p:sp>
-      <p:sp>
-        <p:nvSpPr>
-          <p:cNvPr id="19" name="Shape 14"/>
-          <p:cNvSpPr/>
-          <p:nvPr/>
-        </p:nvSpPr>
-        <p:spPr>
-          <a:xfrm>
-            <a:off x="5827776" y="3188056"/>
-            <a:ext cx="384048" cy="274320"/>
-          </a:xfrm>
-          <a:prstGeom prst="chevron">
-            <a:avLst/>
-          </a:prstGeom>
-          <a:solidFill>
-            <a:srgbClr val="029E9B"/>
-          </a:solidFill>
-          <a:ln/>
-        </p:spPr>
-      </p:sp>
-      <p:sp>
-        <p:nvSpPr>
-          <p:cNvPr id="20" name="Shape 15"/>
-          <p:cNvSpPr/>
-          <p:nvPr/>
-        </p:nvSpPr>
-        <p:spPr>
-          <a:xfrm>
-            <a:off x="6248400" y="1956816"/>
-            <a:ext cx="2438400" cy="2736799"/>
+              <a:t>「ある／ない」と所在を更新</a:t>
+            </a:r>
+            <a:endParaRPr lang="en-US" sz="1250" dirty="0"/>
+          </a:p>
+          <a:p>
+            <a:pPr algn="ctr" indent="0" marL="0">
+              <a:buNone/>
+            </a:pPr>
+            <a:r>
+              <a:rPr lang="en-US" sz="1250" dirty="0">
+                <a:solidFill>
+                  <a:srgbClr val="333333"/>
+                </a:solidFill>
+                <a:latin typeface="Noto Sans JP" pitchFamily="34" charset="0"/>
+                <a:ea typeface="Noto Sans JP" pitchFamily="34" charset="-122"/>
+                <a:cs typeface="Noto Sans JP" pitchFamily="34" charset="-120"/>
+              </a:rPr>
+              <a:t>タグ不要、声で属性を追加</a:t>
+            </a:r>
+            <a:endParaRPr lang="en-US" sz="1250" dirty="0"/>
+          </a:p>
+        </p:txBody>
+      </p:sp>
+      <p:sp>
+        <p:nvSpPr>
+          <p:cNvPr id="16" name="Shape 10"/>
+          <p:cNvSpPr/>
+          <p:nvPr/>
+        </p:nvSpPr>
+        <p:spPr>
+          <a:xfrm>
+            <a:off x="6035040" y="1682496"/>
+            <a:ext cx="2651760" cy="3011119"/>
           </a:xfrm>
           <a:prstGeom prst="roundRect">
             <a:avLst>
-              <a:gd name="adj" fmla="val 3750"/>
+              <a:gd name="adj" fmla="val 3448"/>
             </a:avLst>
           </a:prstGeom>
           <a:solidFill>
@@ -5970,14 +5871,14 @@
       </p:sp>
       <p:sp>
         <p:nvSpPr>
-          <p:cNvPr id="21" name="Shape 16"/>
-          <p:cNvSpPr/>
-          <p:nvPr/>
-        </p:nvSpPr>
-        <p:spPr>
-          <a:xfrm>
-            <a:off x="7193280" y="1682496"/>
-            <a:ext cx="548640" cy="548640"/>
+          <p:cNvPr id="17" name="Shape 11"/>
+          <p:cNvSpPr/>
+          <p:nvPr/>
+        </p:nvSpPr>
+        <p:spPr>
+          <a:xfrm>
+            <a:off x="7063740" y="1883664"/>
+            <a:ext cx="594360" cy="594360"/>
           </a:xfrm>
           <a:prstGeom prst="ellipse">
             <a:avLst/>
@@ -5988,102 +5889,24 @@
           <a:ln/>
         </p:spPr>
       </p:sp>
-      <p:sp>
-        <p:nvSpPr>
-          <p:cNvPr id="22" name="Text 17"/>
-          <p:cNvSpPr/>
-          <p:nvPr/>
-        </p:nvSpPr>
-        <p:spPr>
-          <a:xfrm>
-            <a:off x="7193280" y="1682496"/>
-            <a:ext cx="548640" cy="548640"/>
-          </a:xfrm>
-          <a:prstGeom prst="rect">
-            <a:avLst/>
-          </a:prstGeom>
-          <a:noFill/>
-          <a:ln/>
-        </p:spPr>
-        <p:txBody>
-          <a:bodyPr wrap="square" lIns="0" tIns="0" rIns="0" bIns="0" rtlCol="0" anchor="ctr"/>
-          <a:lstStyle/>
-          <a:p>
-            <a:pPr algn="ctr" indent="0" marL="0">
-              <a:buNone/>
-            </a:pPr>
-            <a:r>
-              <a:rPr lang="en-US" sz="1500" b="1" dirty="0">
-                <a:solidFill>
-                  <a:srgbClr val="FFFFFF"/>
-                </a:solidFill>
-                <a:latin typeface="Noto Sans JP" pitchFamily="34" charset="0"/>
-                <a:ea typeface="Noto Sans JP" pitchFamily="34" charset="-122"/>
-                <a:cs typeface="Noto Sans JP" pitchFamily="34" charset="-120"/>
-              </a:rPr>
-              <a:t>03</a:t>
-            </a:r>
-            <a:endParaRPr lang="en-US" sz="1500" dirty="0"/>
-          </a:p>
-        </p:txBody>
-      </p:sp>
-      <p:sp>
-        <p:nvSpPr>
-          <p:cNvPr id="23" name="Text 18"/>
-          <p:cNvSpPr/>
-          <p:nvPr/>
-        </p:nvSpPr>
-        <p:spPr>
-          <a:xfrm>
-            <a:off x="6339840" y="2340864"/>
-            <a:ext cx="2255520" cy="365760"/>
-          </a:xfrm>
-          <a:prstGeom prst="rect">
-            <a:avLst/>
-          </a:prstGeom>
-          <a:noFill/>
-          <a:ln/>
-        </p:spPr>
-        <p:txBody>
-          <a:bodyPr wrap="square" lIns="0" tIns="0" rIns="0" bIns="0" rtlCol="0" anchor="ctr"/>
-          <a:lstStyle/>
-          <a:p>
-            <a:pPr algn="ctr" indent="0" marL="0">
-              <a:buNone/>
-            </a:pPr>
-            <a:r>
-              <a:rPr lang="en-US" sz="1500" b="1" dirty="0">
-                <a:solidFill>
-                  <a:srgbClr val="1A1A1A"/>
-                </a:solidFill>
-                <a:latin typeface="Noto Sans JP" pitchFamily="34" charset="0"/>
-                <a:ea typeface="Noto Sans JP" pitchFamily="34" charset="-122"/>
-                <a:cs typeface="Noto Sans JP" pitchFamily="34" charset="-120"/>
-              </a:rPr>
-              <a:t>10年後</a:t>
-            </a:r>
-            <a:endParaRPr lang="en-US" sz="1500" dirty="0"/>
-          </a:p>
-        </p:txBody>
-      </p:sp>
       <p:pic>
         <p:nvPicPr>
-          <p:cNvPr id="24" name="Image 3" descr="C:\Users\fan_o\AppData\Local\Temp\ttppt_icons\bot_029E9B_256.png">    </p:cNvPr>
+          <p:cNvPr id="18" name="Image 4" descr="C:\Users\fan_o\AppData\Local\Temp\ttppt_icons\bot_FFFFFF_256.png">    </p:cNvPr>
           <p:cNvPicPr>
             <a:picLocks noChangeAspect="1"/>
           </p:cNvPicPr>
           <p:nvPr/>
         </p:nvPicPr>
         <p:blipFill>
-          <a:blip r:embed="rId4"/>
+          <a:blip r:embed="rId5"/>
           <a:stretch>
             <a:fillRect/>
           </a:stretch>
         </p:blipFill>
         <p:spPr>
           <a:xfrm>
-            <a:off x="6992112" y="2807208"/>
-            <a:ext cx="950976" cy="950976"/>
+            <a:off x="7176668" y="1996592"/>
+            <a:ext cx="368503" cy="368503"/>
           </a:xfrm>
           <a:prstGeom prst="rect">
             <a:avLst/>
@@ -6092,14 +5915,14 @@
       </p:pic>
       <p:sp>
         <p:nvSpPr>
-          <p:cNvPr id="25" name="Text 19"/>
-          <p:cNvSpPr/>
-          <p:nvPr/>
-        </p:nvSpPr>
-        <p:spPr>
-          <a:xfrm>
-            <a:off x="6385560" y="3922776"/>
-            <a:ext cx="2164080" cy="633679"/>
+          <p:cNvPr id="19" name="Text 12"/>
+          <p:cNvSpPr/>
+          <p:nvPr/>
+        </p:nvSpPr>
+        <p:spPr>
+          <a:xfrm>
+            <a:off x="6263640" y="2596896"/>
+            <a:ext cx="2286000" cy="365760"/>
           </a:xfrm>
           <a:prstGeom prst="rect">
             <a:avLst/>
@@ -6108,14 +5931,53 @@
           <a:ln/>
         </p:spPr>
         <p:txBody>
-          <a:bodyPr wrap="square" lIns="0" tIns="0" rIns="0" bIns="0" rtlCol="0" anchor="t"/>
+          <a:bodyPr wrap="square" lIns="0" tIns="0" rIns="0" bIns="0" rtlCol="0" anchor="ctr"/>
           <a:lstStyle/>
           <a:p>
             <a:pPr algn="ctr" indent="0" marL="0">
               <a:buNone/>
             </a:pPr>
             <a:r>
-              <a:rPr lang="en-US" sz="1150" dirty="0">
+              <a:rPr lang="en-US" sz="1600" b="1" dirty="0">
+                <a:solidFill>
+                  <a:srgbClr val="1A1A1A"/>
+                </a:solidFill>
+                <a:latin typeface="Noto Sans JP" pitchFamily="34" charset="0"/>
+                <a:ea typeface="Noto Sans JP" pitchFamily="34" charset="-122"/>
+                <a:cs typeface="Noto Sans JP" pitchFamily="34" charset="-120"/>
+              </a:rPr>
+              <a:t>10年後、巡回へ</a:t>
+            </a:r>
+            <a:endParaRPr lang="en-US" sz="1600" dirty="0"/>
+          </a:p>
+        </p:txBody>
+      </p:sp>
+      <p:sp>
+        <p:nvSpPr>
+          <p:cNvPr id="20" name="Text 13"/>
+          <p:cNvSpPr/>
+          <p:nvPr/>
+        </p:nvSpPr>
+        <p:spPr>
+          <a:xfrm>
+            <a:off x="6263640" y="2980944"/>
+            <a:ext cx="2286000" cy="1548079"/>
+          </a:xfrm>
+          <a:prstGeom prst="rect">
+            <a:avLst/>
+          </a:prstGeom>
+          <a:noFill/>
+          <a:ln/>
+        </p:spPr>
+        <p:txBody>
+          <a:bodyPr wrap="square" lIns="0" tIns="0" rIns="0" bIns="0" rtlCol="0" anchor="ctr"/>
+          <a:lstStyle/>
+          <a:p>
+            <a:pPr algn="ctr" indent="0" marL="0">
+              <a:buNone/>
+            </a:pPr>
+            <a:r>
+              <a:rPr lang="en-US" sz="1250" dirty="0">
                 <a:solidFill>
                   <a:srgbClr val="333333"/>
                 </a:solidFill>
@@ -6123,16 +5985,16 @@
                 <a:ea typeface="Noto Sans JP" pitchFamily="34" charset="-122"/>
                 <a:cs typeface="Noto Sans JP" pitchFamily="34" charset="-120"/>
               </a:rPr>
-              <a:t>ロボットが工場と事務所を巡回し</a:t>
-            </a:r>
-            <a:endParaRPr lang="en-US" sz="1150" dirty="0"/>
+              <a:t>AIグラス・常設カメラから</a:t>
+            </a:r>
+            <a:endParaRPr lang="en-US" sz="1250" dirty="0"/>
           </a:p>
           <a:p>
             <a:pPr algn="ctr" indent="0" marL="0">
               <a:buNone/>
             </a:pPr>
             <a:r>
-              <a:rPr lang="en-US" sz="1150" dirty="0">
+              <a:rPr lang="en-US" sz="1250" dirty="0">
                 <a:solidFill>
                   <a:srgbClr val="333333"/>
                 </a:solidFill>
@@ -6140,9 +6002,26 @@
                 <a:ea typeface="Noto Sans JP" pitchFamily="34" charset="-122"/>
                 <a:cs typeface="Noto Sans JP" pitchFamily="34" charset="-120"/>
               </a:rPr>
-              <a:t>台帳を自動更新</a:t>
-            </a:r>
-            <a:endParaRPr lang="en-US" sz="1150" dirty="0"/>
+              <a:t>工場・事務所をロボットが巡回</a:t>
+            </a:r>
+            <a:endParaRPr lang="en-US" sz="1250" dirty="0"/>
+          </a:p>
+          <a:p>
+            <a:pPr algn="ctr" indent="0" marL="0">
+              <a:buNone/>
+            </a:pPr>
+            <a:r>
+              <a:rPr lang="en-US" sz="1250" dirty="0">
+                <a:solidFill>
+                  <a:srgbClr val="333333"/>
+                </a:solidFill>
+                <a:latin typeface="Noto Sans JP" pitchFamily="34" charset="0"/>
+                <a:ea typeface="Noto Sans JP" pitchFamily="34" charset="-122"/>
+                <a:cs typeface="Noto Sans JP" pitchFamily="34" charset="-120"/>
+              </a:rPr>
+              <a:t>記録を自動更新</a:t>
+            </a:r>
+            <a:endParaRPr lang="en-US" sz="1250" dirty="0"/>
           </a:p>
         </p:txBody>
       </p:sp>
